--- a/modulo-2/PF1821-agentes-low-code/produccion/videos/AE4-capsula.pptx
+++ b/modulo-2/PF1821-agentes-low-code/produccion/videos/AE4-capsula.pptx
@@ -18,6 +18,7 @@
     <p:sldId id="263" r:id="rId17"/>
     <p:sldId id="264" r:id="rId18"/>
     <p:sldId id="265" r:id="rId19"/>
+    <p:sldId id="266" r:id="rId20"/>
   </p:sldIdLst>
   <p:sldSz cx="12192000" cy="6858000"/>
   <p:notesSz cx="6858000" cy="9144000"/>
@@ -161,7 +162,7 @@
           <a:p>
             <a:r>
               <a:rPr lang="es-CL" dirty="0"/>
-              <a:t>Te doy la bienvenida a la cápsula 4 del módulo 2: Decidir y depurar. "Que el workflow decida, y que se deje revisar".</a:t>
+              <a:t>Te doy la bienvenida a la cápsula 4 del módulo 2, Fundamentos de n8n y manipulación de datos: Decidir y depurar. "Que el workflow decida, y que se deje revisar".</a:t>
             </a:r>
           </a:p>
         </p:txBody>
@@ -220,6 +221,65 @@
           <a:p>
             <a:r>
               <a:rPr lang="es-CL" dirty="0"/>
+              <a:t>Buenas prácticas de prueba. Datos de prueba que incluyan casos sucios, probar cada ruta, nombrar los nodos por lo que hacen, anotar cada falla en la bitácora.</a:t>
+            </a:r>
+          </a:p>
+        </p:txBody>
+      </p:sp>
+    </p:spTree>
+  </p:cSld>
+  <p:clrMapOvr>
+    <a:masterClrMapping/>
+  </p:clrMapOvr>
+</p:notes>
+</file>
+
+<file path=ppt/notesSlides/notesSlide11.xml><?xml version="1.0" encoding="utf-8"?>
+<p:notes xmlns:a="http://schemas.openxmlformats.org/drawingml/2006/main" xmlns:r="http://schemas.openxmlformats.org/officeDocument/2006/relationships" xmlns:p="http://schemas.openxmlformats.org/presentationml/2006/main">
+  <p:cSld>
+    <p:spTree>
+      <p:nvGrpSpPr>
+        <p:cNvPr id="1" name=""/>
+        <p:cNvGrpSpPr/>
+        <p:nvPr/>
+      </p:nvGrpSpPr>
+      <p:grpSpPr>
+        <a:xfrm>
+          <a:off x="0" y="0"/>
+          <a:ext cx="0" cy="0"/>
+          <a:chOff x="0" y="0"/>
+          <a:chExt cx="0" cy="0"/>
+        </a:xfrm>
+      </p:grpSpPr>
+      <p:sp>
+        <p:nvSpPr>
+          <p:cNvPr id="2" name="Imagen de diapositiva"/>
+          <p:cNvSpPr>
+            <a:spLocks noGrp="1" noRot="1" noChangeAspect="1"/>
+          </p:cNvSpPr>
+          <p:nvPr>
+            <p:ph type="sldImg"/>
+          </p:nvPr>
+        </p:nvSpPr>
+        <p:spPr/>
+      </p:sp>
+      <p:sp>
+        <p:nvSpPr>
+          <p:cNvPr id="3" name="Notas"/>
+          <p:cNvSpPr>
+            <a:spLocks noGrp="1"/>
+          </p:cNvSpPr>
+          <p:nvPr>
+            <p:ph type="body" idx="1"/>
+          </p:nvPr>
+        </p:nvSpPr>
+        <p:spPr/>
+        <p:txBody>
+          <a:bodyPr/>
+          <a:lstStyle/>
+          <a:p>
+            <a:r>
+              <a:rPr lang="es-CL" dirty="0"/>
               <a:t>Tu tarea. Video interactivo y actividad 2: "Rescate del workflow roto".</a:t>
             </a:r>
           </a:p>
@@ -279,7 +339,7 @@
           <a:p>
             <a:r>
               <a:rPr lang="es-CL" dirty="0"/>
-              <a:t>If o Switch. If: dos caminos (verdadero y falso). Switch: varias rutas por reglas o por una expresión.</a:t>
+              <a:t>Esta cápsula corresponde al aprendizaje esperado 4 del plan formativo: Implementar lógica condicional y estructuras de control en workflows, aplicando buenas prácticas de debugging y trazabilidad. Sus criterios de evaluación son: Configura workflows con múltiples rutas condicionales. Utiliza operadores lógicos y comparaciones en expresiones n8n. Aplica herramientas de debugging para identificar errores básicos en workflows.</a:t>
             </a:r>
           </a:p>
         </p:txBody>
@@ -338,7 +398,7 @@
           <a:p>
             <a:r>
               <a:rPr lang="es-CL" dirty="0"/>
-              <a:t>Operadores. Es igual, contiene, mayor o igual, está vacío, existe; se combinan con AND (todas) y OR (al menos una). En expresiones: ===, &gt;=, &amp;&amp;, \|\| (o), !.</a:t>
+              <a:t>If o Switch. If: dos caminos (verdadero y falso). Switch: varias rutas por reglas o por una expresión.</a:t>
             </a:r>
           </a:p>
         </p:txBody>
@@ -397,7 +457,7 @@
           <a:p>
             <a:r>
               <a:rPr lang="es-CL" dirty="0"/>
-              <a:t>Enrutar datos. Ejemplo de Mercado Austral: mayorista (por tipo o por monto), luego ventas; regiones, luego despacho regional; resto, luego bodega RM. El orden de las reglas importa: gana la primera que se cumple.</a:t>
+              <a:t>Operadores. Es igual, contiene, mayor o igual, está vacío, existe; se combinan con AND (todas) y OR (al menos una). En expresiones: triple igual, mayor o igual, doble ampersand (y), doble barra (o), signo de exclamación (no).</a:t>
             </a:r>
           </a:p>
         </p:txBody>
@@ -456,7 +516,7 @@
           <a:p>
             <a:r>
               <a:rPr lang="es-CL" dirty="0"/>
-              <a:t>Casos borde. Campos vacíos, tipos equivocados, valores que nadie previó ("distribuidor"), duplicados. La salida de respaldo evita que se pierdan en silencio.</a:t>
+              <a:t>Enrutar datos. Ejemplo de Mercado Austral: mayorista (por tipo o por monto), luego ventas; regiones, luego despacho regional; resto, luego bodega RM. El orden de las reglas importa: gana la primera que se cumple.</a:t>
             </a:r>
           </a:p>
         </p:txBody>
@@ -515,7 +575,7 @@
           <a:p>
             <a:r>
               <a:rPr lang="es-CL" dirty="0"/>
-              <a:t>Herramientas de depuración. Historial de ejecuciones (cada corrida con sus datos), ejecutar un solo nodo, datos fijados, mensajes de error completos.</a:t>
+              <a:t>Casos borde. Campos vacíos, tipos equivocados, valores que nadie previó ("distribuidor"), duplicados. La salida de respaldo evita que se pierdan en silencio.</a:t>
             </a:r>
           </a:p>
         </p:txBody>
@@ -574,7 +634,7 @@
           <a:p>
             <a:r>
               <a:rPr lang="es-CL" dirty="0"/>
-              <a:t>Contar ítems. La prueba más útil: ¿cuántos ítems entran y cuántos salen de cada nodo? Si no cuadra, ahí está el problema.</a:t>
+              <a:t>Herramientas de depuración. Historial de ejecuciones (cada corrida con sus datos), ejecutar un solo nodo, datos fijados, mensajes de error completos.</a:t>
             </a:r>
           </a:p>
         </p:txBody>
@@ -633,7 +693,7 @@
           <a:p>
             <a:r>
               <a:rPr lang="es-CL" dirty="0"/>
-              <a:t>Trazabilidad. Guardar en cada registro la ruta tomada y el id de la ejecución ({{ $execution.id }}); manejo de errores del nodo (On Error, luego Continue (using error output)) y un workflow de errores con Error Trigger.</a:t>
+              <a:t>Contar ítems. La prueba más útil: ¿cuántos ítems entran y cuántos salen de cada nodo? Si no cuadra, ahí está el problema.</a:t>
             </a:r>
           </a:p>
         </p:txBody>
@@ -692,7 +752,7 @@
           <a:p>
             <a:r>
               <a:rPr lang="es-CL" dirty="0"/>
-              <a:t>Buenas prácticas de prueba. Datos de prueba que incluyan casos sucios, probar cada ruta, nombrar los nodos por lo que hacen, anotar cada falla en la bitácora.</a:t>
+              <a:t>Trazabilidad. Guardar en cada registro la ruta tomada y el id de la ejecución (el identificador de la ejecución); manejo de errores del nodo (On Error, luego Continue (using error output)) y un workflow de errores con Error Trigger.</a:t>
             </a:r>
           </a:p>
         </p:txBody>
@@ -841,6 +901,39 @@
       </p:sp>
       <p:sp>
         <p:nvSpPr>
+          <p:cNvPr id="7" name="Etiqueta"/>
+          <p:cNvSpPr txBox="1"/>
+          <p:nvPr/>
+        </p:nvSpPr>
+        <p:spPr>
+          <a:xfrm>
+            <a:off x="609600" y="609600"/>
+            <a:ext cx="7315200" cy="533400"/>
+          </a:xfrm>
+          <a:prstGeom prst="rect">
+            <a:avLst/>
+          </a:prstGeom>
+          <a:noFill/>
+        </p:spPr>
+        <p:txBody>
+          <a:bodyPr wrap="square" lIns="0" rIns="0" anchor="b">
+            <a:normAutofit/>
+          </a:bodyPr>
+          <a:lstStyle/>
+          <a:p>
+            <a:r>
+              <a:rPr lang="es-CL" sz="1200" b="1" dirty="0">
+                <a:solidFill>
+                  <a:srgbClr val="9FC3E6"/>
+                </a:solidFill>
+              </a:rPr>
+              <a:t>MÓDULO 2 · FUNDAMENTOS DE N8N Y MANIPULACIÓN DE DATOS</a:t>
+            </a:r>
+          </a:p>
+        </p:txBody>
+      </p:sp>
+      <p:sp>
+        <p:nvSpPr>
           <p:cNvPr id="4" name="Título"/>
           <p:cNvSpPr txBox="1"/>
           <p:nvPr/>
@@ -903,6 +996,16 @@
               <a:t>"Que el workflow decida, y que se deje revisar".</a:t>
             </a:r>
           </a:p>
+          <a:p>
+            <a:r>
+              <a:rPr lang="es-CL" sz="2200" dirty="0">
+                <a:solidFill>
+                  <a:srgbClr val="E5E7EB"/>
+                </a:solidFill>
+              </a:rPr>
+              <a:t>Contenido del plan: 4. LÓGICA CONDICIONAL Y DEBUGGING EN N8N</a:t>
+            </a:r>
+          </a:p>
         </p:txBody>
       </p:sp>
       <p:sp>
@@ -933,7 +1036,7 @@
                   <a:srgbClr val="CBD5E1"/>
                 </a:solidFill>
               </a:rPr>
-              <a:t>PF1821 · Módulo 2 · Cápsula 4 · AE4</a:t>
+              <a:t>PF1821 · Módulo 2 · Cápsula 4 · Aprendizaje esperado 4</a:t>
             </a:r>
           </a:p>
         </p:txBody>
@@ -987,14 +1090,57 @@
       </p:sp>
       <p:sp>
         <p:nvSpPr>
+          <p:cNvPr id="7" name="Etiqueta"/>
+          <p:cNvSpPr txBox="1"/>
+          <p:nvPr/>
+        </p:nvSpPr>
+        <p:spPr>
+          <a:xfrm>
+            <a:off x="609600" y="228600"/>
+            <a:ext cx="7315200" cy="914400"/>
+          </a:xfrm>
+          <a:prstGeom prst="rect">
+            <a:avLst/>
+          </a:prstGeom>
+          <a:noFill/>
+        </p:spPr>
+        <p:txBody>
+          <a:bodyPr wrap="square" lIns="0" rIns="0" anchor="b">
+            <a:normAutofit/>
+          </a:bodyPr>
+          <a:lstStyle/>
+          <a:p>
+            <a:r>
+              <a:rPr lang="es-CL" sz="1200" b="1" dirty="0">
+                <a:solidFill>
+                  <a:srgbClr val="0E7490"/>
+                </a:solidFill>
+              </a:rPr>
+              <a:t>CONTENIDO DEL PLAN (TEXTUAL)</a:t>
+            </a:r>
+          </a:p>
+          <a:p>
+            <a:r>
+              <a:rPr lang="es-CL" sz="1200" b="1" dirty="0">
+                <a:solidFill>
+                  <a:srgbClr val="0F3D5E"/>
+                </a:solidFill>
+              </a:rPr>
+              <a:t>MEJORES PRÁCTICAS DE TESTING.</a:t>
+            </a:r>
+          </a:p>
+        </p:txBody>
+      </p:sp>
+      <p:sp>
+        <p:nvSpPr>
           <p:cNvPr id="3" name="Título"/>
           <p:cNvSpPr txBox="1"/>
           <p:nvPr/>
         </p:nvSpPr>
         <p:spPr>
           <a:xfrm>
-            <a:off x="609600" y="381000"/>
-            <a:ext cx="7315200" cy="990600"/>
+            <a:off x="609600" y="1181100"/>
+            <a:ext cx="7315200" cy="685800"/>
           </a:xfrm>
           <a:prstGeom prst="rect">
             <a:avLst/>
@@ -1008,12 +1154,12 @@
           <a:lstStyle/>
           <a:p>
             <a:r>
-              <a:rPr lang="es-CL" sz="3200" b="1" dirty="0">
+              <a:rPr lang="es-CL" sz="2800" b="1" dirty="0">
                 <a:solidFill>
                   <a:srgbClr val="0F3D5E"/>
                 </a:solidFill>
               </a:rPr>
-              <a:t>Tu tarea</a:t>
+              <a:t>Buenas prácticas de prueba</a:t>
             </a:r>
           </a:p>
         </p:txBody>
@@ -1026,7 +1172,7 @@
         </p:nvSpPr>
         <p:spPr>
           <a:xfrm>
-            <a:off x="609600" y="1447800"/>
+            <a:off x="609600" y="1943100"/>
             <a:ext cx="1066800" cy="50800"/>
           </a:xfrm>
           <a:prstGeom prst="rect">
@@ -1048,8 +1194,8 @@
         </p:nvSpPr>
         <p:spPr>
           <a:xfrm>
-            <a:off x="609600" y="1676400"/>
-            <a:ext cx="7315200" cy="4419600"/>
+            <a:off x="609600" y="2095500"/>
+            <a:ext cx="7315200" cy="4000500"/>
           </a:xfrm>
           <a:prstGeom prst="rect">
             <a:avLst/>
@@ -1078,7 +1224,7 @@
                   <a:srgbClr val="1F2937"/>
                 </a:solidFill>
               </a:rPr>
-              <a:t>Video interactivo R06 y actividad 2: "Rescate del workflow roto".</a:t>
+              <a:t>Datos de prueba que incluyan casos sucios · probar cada ruta · nombrar los nodos por lo que hacen · anotar cada falla en la bitácora.</a:t>
             </a:r>
           </a:p>
         </p:txBody>
@@ -1111,7 +1257,218 @@
                   <a:srgbClr val="6B7280"/>
                 </a:solidFill>
               </a:rPr>
-              <a:t>PF1821 · Módulo 2 · Cápsula 4 · AE4</a:t>
+              <a:t>PF1821 · Módulo 2 · Cápsula 4 · Aprendizaje esperado 4</a:t>
+            </a:r>
+          </a:p>
+        </p:txBody>
+      </p:sp>
+    </p:spTree>
+  </p:cSld>
+  <p:clrMapOvr>
+    <a:masterClrMapping/>
+  </p:clrMapOvr>
+</p:sld>
+</file>
+
+<file path=ppt/slides/slide11.xml><?xml version="1.0" encoding="utf-8"?>
+<p:sld xmlns:a="http://schemas.openxmlformats.org/drawingml/2006/main" xmlns:r="http://schemas.openxmlformats.org/officeDocument/2006/relationships" xmlns:p="http://schemas.openxmlformats.org/presentationml/2006/main">
+  <p:cSld>
+    <p:spTree>
+      <p:nvGrpSpPr>
+        <p:cNvPr id="1" name=""/>
+        <p:cNvGrpSpPr/>
+        <p:nvPr/>
+      </p:nvGrpSpPr>
+      <p:grpSpPr>
+        <a:xfrm>
+          <a:off x="0" y="0"/>
+          <a:ext cx="0" cy="0"/>
+          <a:chOff x="0" y="0"/>
+          <a:chExt cx="0" cy="0"/>
+        </a:xfrm>
+      </p:grpSpPr>
+      <p:sp>
+        <p:nvSpPr>
+          <p:cNvPr id="2" name="Franja 2"/>
+          <p:cNvSpPr/>
+          <p:nvPr/>
+        </p:nvSpPr>
+        <p:spPr>
+          <a:xfrm>
+            <a:off x="0" y="0"/>
+            <a:ext cx="12192000" cy="152400"/>
+          </a:xfrm>
+          <a:prstGeom prst="rect">
+            <a:avLst/>
+          </a:prstGeom>
+          <a:solidFill>
+            <a:srgbClr val="0E7490"/>
+          </a:solidFill>
+          <a:ln>
+            <a:noFill/>
+          </a:ln>
+        </p:spPr>
+      </p:sp>
+      <p:sp>
+        <p:nvSpPr>
+          <p:cNvPr id="7" name="Etiqueta"/>
+          <p:cNvSpPr txBox="1"/>
+          <p:nvPr/>
+        </p:nvSpPr>
+        <p:spPr>
+          <a:xfrm>
+            <a:off x="609600" y="228600"/>
+            <a:ext cx="7315200" cy="914400"/>
+          </a:xfrm>
+          <a:prstGeom prst="rect">
+            <a:avLst/>
+          </a:prstGeom>
+          <a:noFill/>
+        </p:spPr>
+        <p:txBody>
+          <a:bodyPr wrap="square" lIns="0" rIns="0" anchor="b">
+            <a:normAutofit/>
+          </a:bodyPr>
+          <a:lstStyle/>
+          <a:p>
+            <a:r>
+              <a:rPr lang="es-CL" sz="1200" b="1" dirty="0">
+                <a:solidFill>
+                  <a:srgbClr val="0E7490"/>
+                </a:solidFill>
+              </a:rPr>
+              <a:t>PRÁCTICA DEL APRENDIZAJE ESPERADO 4</a:t>
+            </a:r>
+          </a:p>
+        </p:txBody>
+      </p:sp>
+      <p:sp>
+        <p:nvSpPr>
+          <p:cNvPr id="3" name="Título"/>
+          <p:cNvSpPr txBox="1"/>
+          <p:nvPr/>
+        </p:nvSpPr>
+        <p:spPr>
+          <a:xfrm>
+            <a:off x="609600" y="1181100"/>
+            <a:ext cx="7315200" cy="685800"/>
+          </a:xfrm>
+          <a:prstGeom prst="rect">
+            <a:avLst/>
+          </a:prstGeom>
+          <a:noFill/>
+        </p:spPr>
+        <p:txBody>
+          <a:bodyPr wrap="square" lIns="0" rIns="0" anchor="b">
+            <a:normAutofit/>
+          </a:bodyPr>
+          <a:lstStyle/>
+          <a:p>
+            <a:r>
+              <a:rPr lang="es-CL" sz="2800" b="1" dirty="0">
+                <a:solidFill>
+                  <a:srgbClr val="0F3D5E"/>
+                </a:solidFill>
+              </a:rPr>
+              <a:t>Tu tarea</a:t>
+            </a:r>
+          </a:p>
+        </p:txBody>
+      </p:sp>
+      <p:sp>
+        <p:nvSpPr>
+          <p:cNvPr id="4" name="Franja 4"/>
+          <p:cNvSpPr/>
+          <p:nvPr/>
+        </p:nvSpPr>
+        <p:spPr>
+          <a:xfrm>
+            <a:off x="609600" y="1943100"/>
+            <a:ext cx="1066800" cy="50800"/>
+          </a:xfrm>
+          <a:prstGeom prst="rect">
+            <a:avLst/>
+          </a:prstGeom>
+          <a:solidFill>
+            <a:srgbClr val="F59E0B"/>
+          </a:solidFill>
+          <a:ln>
+            <a:noFill/>
+          </a:ln>
+        </p:spPr>
+      </p:sp>
+      <p:sp>
+        <p:nvSpPr>
+          <p:cNvPr id="5" name="Contenido"/>
+          <p:cNvSpPr txBox="1"/>
+          <p:nvPr/>
+        </p:nvSpPr>
+        <p:spPr>
+          <a:xfrm>
+            <a:off x="609600" y="2095500"/>
+            <a:ext cx="7315200" cy="4000500"/>
+          </a:xfrm>
+          <a:prstGeom prst="rect">
+            <a:avLst/>
+          </a:prstGeom>
+          <a:noFill/>
+        </p:spPr>
+        <p:txBody>
+          <a:bodyPr wrap="square" lIns="0" rIns="0" anchor="t">
+            <a:normAutofit/>
+          </a:bodyPr>
+          <a:lstStyle/>
+          <a:p>
+            <a:pPr marL="342900" indent="-342900">
+              <a:spcBef>
+                <a:spcPts val="900"/>
+              </a:spcBef>
+              <a:buClr>
+                <a:srgbClr val="0E7490"/>
+              </a:buClr>
+              <a:buFont typeface="Arial"/>
+              <a:buChar char="•"/>
+            </a:pPr>
+            <a:r>
+              <a:rPr lang="es-CL" sz="2400" dirty="0">
+                <a:solidFill>
+                  <a:srgbClr val="1F2937"/>
+                </a:solidFill>
+              </a:rPr>
+              <a:t>Video interactivo R06 y actividad 2: "Rescate del workflow roto".</a:t>
+            </a:r>
+          </a:p>
+        </p:txBody>
+      </p:sp>
+      <p:sp>
+        <p:nvSpPr>
+          <p:cNvPr id="6" name="Pie"/>
+          <p:cNvSpPr txBox="1"/>
+          <p:nvPr/>
+        </p:nvSpPr>
+        <p:spPr>
+          <a:xfrm>
+            <a:off x="609600" y="6248400"/>
+            <a:ext cx="7315200" cy="381000"/>
+          </a:xfrm>
+          <a:prstGeom prst="rect">
+            <a:avLst/>
+          </a:prstGeom>
+          <a:noFill/>
+        </p:spPr>
+        <p:txBody>
+          <a:bodyPr wrap="square" lIns="0" rIns="0" anchor="t">
+            <a:normAutofit/>
+          </a:bodyPr>
+          <a:lstStyle/>
+          <a:p>
+            <a:r>
+              <a:rPr lang="es-CL" sz="1200" dirty="0">
+                <a:solidFill>
+                  <a:srgbClr val="6B7280"/>
+                </a:solidFill>
+              </a:rPr>
+              <a:t>PF1821 · Módulo 2 · Cápsula 4 · Aprendizaje esperado 4</a:t>
             </a:r>
           </a:p>
         </p:txBody>
@@ -1165,14 +1522,47 @@
       </p:sp>
       <p:sp>
         <p:nvSpPr>
+          <p:cNvPr id="7" name="Etiqueta"/>
+          <p:cNvSpPr txBox="1"/>
+          <p:nvPr/>
+        </p:nvSpPr>
+        <p:spPr>
+          <a:xfrm>
+            <a:off x="609600" y="228600"/>
+            <a:ext cx="7315200" cy="914400"/>
+          </a:xfrm>
+          <a:prstGeom prst="rect">
+            <a:avLst/>
+          </a:prstGeom>
+          <a:noFill/>
+        </p:spPr>
+        <p:txBody>
+          <a:bodyPr wrap="square" lIns="0" rIns="0" anchor="b">
+            <a:normAutofit/>
+          </a:bodyPr>
+          <a:lstStyle/>
+          <a:p>
+            <a:r>
+              <a:rPr lang="es-CL" sz="1200" b="1" dirty="0">
+                <a:solidFill>
+                  <a:srgbClr val="0E7490"/>
+                </a:solidFill>
+              </a:rPr>
+              <a:t>APRENDIZAJE Y CRITERIOS TEXTUALES DEL PLAN FORMATIVO</a:t>
+            </a:r>
+          </a:p>
+        </p:txBody>
+      </p:sp>
+      <p:sp>
+        <p:nvSpPr>
           <p:cNvPr id="3" name="Título"/>
           <p:cNvSpPr txBox="1"/>
           <p:nvPr/>
         </p:nvSpPr>
         <p:spPr>
           <a:xfrm>
-            <a:off x="609600" y="381000"/>
-            <a:ext cx="7315200" cy="990600"/>
+            <a:off x="609600" y="1181100"/>
+            <a:ext cx="7315200" cy="685800"/>
           </a:xfrm>
           <a:prstGeom prst="rect">
             <a:avLst/>
@@ -1186,12 +1576,12 @@
           <a:lstStyle/>
           <a:p>
             <a:r>
-              <a:rPr lang="es-CL" sz="3200" b="1" dirty="0">
+              <a:rPr lang="es-CL" sz="2800" b="1" dirty="0">
                 <a:solidFill>
                   <a:srgbClr val="0F3D5E"/>
                 </a:solidFill>
               </a:rPr>
-              <a:t>If o Switch</a:t>
+              <a:t>Aprendizaje esperado 4</a:t>
             </a:r>
           </a:p>
         </p:txBody>
@@ -1204,7 +1594,7 @@
         </p:nvSpPr>
         <p:spPr>
           <a:xfrm>
-            <a:off x="609600" y="1447800"/>
+            <a:off x="609600" y="1943100"/>
             <a:ext cx="1066800" cy="50800"/>
           </a:xfrm>
           <a:prstGeom prst="rect">
@@ -1226,8 +1616,8 @@
         </p:nvSpPr>
         <p:spPr>
           <a:xfrm>
-            <a:off x="609600" y="1676400"/>
-            <a:ext cx="7315200" cy="4419600"/>
+            <a:off x="609600" y="2095500"/>
+            <a:ext cx="7315200" cy="4000500"/>
           </a:xfrm>
           <a:prstGeom prst="rect">
             <a:avLst/>
@@ -1251,20 +1641,28 @@
               <a:buChar char="•"/>
             </a:pPr>
             <a:r>
-              <a:rPr lang="es-CL" sz="2400" b="1" dirty="0">
+              <a:rPr lang="es-CL" sz="1800" b="1" dirty="0">
                 <a:solidFill>
                   <a:srgbClr val="1F2937"/>
                 </a:solidFill>
               </a:rPr>
-              <a:t>If</a:t>
-            </a:r>
-            <a:r>
-              <a:rPr lang="es-CL" sz="2400" dirty="0">
-                <a:solidFill>
-                  <a:srgbClr val="1F2937"/>
-                </a:solidFill>
-              </a:rPr>
-              <a:t>: dos caminos (verdadero y falso).</a:t>
+              <a:t>IMPLEMENTAR LÓGICA CONDICIONAL Y ESTRUCTURAS DE CONTROL EN WORKFLOWS, APLICANDO BUENAS PRÁCTICAS DE DEBUGGING Y TRAZABILIDAD.</a:t>
+            </a:r>
+          </a:p>
+          <a:p>
+            <a:pPr marL="0" indent="0">
+              <a:spcBef>
+                <a:spcPts val="1400"/>
+              </a:spcBef>
+              <a:buNone/>
+            </a:pPr>
+            <a:r>
+              <a:rPr lang="es-CL" sz="1600" b="1" dirty="0">
+                <a:solidFill>
+                  <a:srgbClr val="0E7490"/>
+                </a:solidFill>
+              </a:rPr>
+              <a:t>CRITERIOS DE EVALUACIÓN</a:t>
             </a:r>
           </a:p>
           <a:p>
@@ -1279,20 +1677,52 @@
               <a:buChar char="•"/>
             </a:pPr>
             <a:r>
-              <a:rPr lang="es-CL" sz="2400" b="1" dirty="0">
+              <a:rPr lang="es-CL" sz="1800" dirty="0">
                 <a:solidFill>
                   <a:srgbClr val="1F2937"/>
                 </a:solidFill>
               </a:rPr>
-              <a:t>Switch</a:t>
-            </a:r>
-            <a:r>
-              <a:rPr lang="es-CL" sz="2400" dirty="0">
+              <a:t>4.1 CONFIGURA WORKFLOWS CON MÚLTIPLES RUTAS CONDICIONALES.</a:t>
+            </a:r>
+          </a:p>
+          <a:p>
+            <a:pPr marL="342900" indent="-342900">
+              <a:spcBef>
+                <a:spcPts val="900"/>
+              </a:spcBef>
+              <a:buClr>
+                <a:srgbClr val="0E7490"/>
+              </a:buClr>
+              <a:buFont typeface="Arial"/>
+              <a:buChar char="•"/>
+            </a:pPr>
+            <a:r>
+              <a:rPr lang="es-CL" sz="1800" dirty="0">
                 <a:solidFill>
                   <a:srgbClr val="1F2937"/>
                 </a:solidFill>
               </a:rPr>
-              <a:t>: varias rutas por reglas o por una expresión.</a:t>
+              <a:t>4.2 UTILIZA OPERADORES LÓGICOS Y COMPARACIONES EN EXPRESIONES N8N.</a:t>
+            </a:r>
+          </a:p>
+          <a:p>
+            <a:pPr marL="342900" indent="-342900">
+              <a:spcBef>
+                <a:spcPts val="900"/>
+              </a:spcBef>
+              <a:buClr>
+                <a:srgbClr val="0E7490"/>
+              </a:buClr>
+              <a:buFont typeface="Arial"/>
+              <a:buChar char="•"/>
+            </a:pPr>
+            <a:r>
+              <a:rPr lang="es-CL" sz="1800" dirty="0">
+                <a:solidFill>
+                  <a:srgbClr val="1F2937"/>
+                </a:solidFill>
+              </a:rPr>
+              <a:t>4.3 APLICA HERRAMIENTAS DE DEBUGGING PARA IDENTIFICAR ERRORES BÁSICOS EN WORKFLOWS.</a:t>
             </a:r>
           </a:p>
         </p:txBody>
@@ -1325,7 +1755,7 @@
                   <a:srgbClr val="6B7280"/>
                 </a:solidFill>
               </a:rPr>
-              <a:t>PF1821 · Módulo 2 · Cápsula 4 · AE4</a:t>
+              <a:t>PF1821 · Módulo 2 · Cápsula 4 · Aprendizaje esperado 4</a:t>
             </a:r>
           </a:p>
         </p:txBody>
@@ -1379,14 +1809,57 @@
       </p:sp>
       <p:sp>
         <p:nvSpPr>
+          <p:cNvPr id="7" name="Etiqueta"/>
+          <p:cNvSpPr txBox="1"/>
+          <p:nvPr/>
+        </p:nvSpPr>
+        <p:spPr>
+          <a:xfrm>
+            <a:off x="609600" y="228600"/>
+            <a:ext cx="7315200" cy="914400"/>
+          </a:xfrm>
+          <a:prstGeom prst="rect">
+            <a:avLst/>
+          </a:prstGeom>
+          <a:noFill/>
+        </p:spPr>
+        <p:txBody>
+          <a:bodyPr wrap="square" lIns="0" rIns="0" anchor="b">
+            <a:normAutofit/>
+          </a:bodyPr>
+          <a:lstStyle/>
+          <a:p>
+            <a:r>
+              <a:rPr lang="es-CL" sz="1200" b="1" dirty="0">
+                <a:solidFill>
+                  <a:srgbClr val="0E7490"/>
+                </a:solidFill>
+              </a:rPr>
+              <a:t>CONTENIDO DEL PLAN (TEXTUAL)</a:t>
+            </a:r>
+          </a:p>
+          <a:p>
+            <a:r>
+              <a:rPr lang="es-CL" sz="1200" b="1" dirty="0">
+                <a:solidFill>
+                  <a:srgbClr val="0F3D5E"/>
+                </a:solidFill>
+              </a:rPr>
+              <a:t>ROUTING DE DATOS.</a:t>
+            </a:r>
+          </a:p>
+        </p:txBody>
+      </p:sp>
+      <p:sp>
+        <p:nvSpPr>
           <p:cNvPr id="3" name="Título"/>
           <p:cNvSpPr txBox="1"/>
           <p:nvPr/>
         </p:nvSpPr>
         <p:spPr>
           <a:xfrm>
-            <a:off x="609600" y="381000"/>
-            <a:ext cx="7315200" cy="990600"/>
+            <a:off x="609600" y="1181100"/>
+            <a:ext cx="7315200" cy="685800"/>
           </a:xfrm>
           <a:prstGeom prst="rect">
             <a:avLst/>
@@ -1400,12 +1873,12 @@
           <a:lstStyle/>
           <a:p>
             <a:r>
-              <a:rPr lang="es-CL" sz="3200" b="1" dirty="0">
+              <a:rPr lang="es-CL" sz="2800" b="1" dirty="0">
                 <a:solidFill>
                   <a:srgbClr val="0F3D5E"/>
                 </a:solidFill>
               </a:rPr>
-              <a:t>Operadores</a:t>
+              <a:t>If o Switch</a:t>
             </a:r>
           </a:p>
         </p:txBody>
@@ -1418,7 +1891,7 @@
         </p:nvSpPr>
         <p:spPr>
           <a:xfrm>
-            <a:off x="609600" y="1447800"/>
+            <a:off x="609600" y="1943100"/>
             <a:ext cx="1066800" cy="50800"/>
           </a:xfrm>
           <a:prstGeom prst="rect">
@@ -1440,8 +1913,8 @@
         </p:nvSpPr>
         <p:spPr>
           <a:xfrm>
-            <a:off x="609600" y="1676400"/>
-            <a:ext cx="7315200" cy="4419600"/>
+            <a:off x="609600" y="2095500"/>
+            <a:ext cx="7315200" cy="4000500"/>
           </a:xfrm>
           <a:prstGeom prst="rect">
             <a:avLst/>
@@ -1465,44 +1938,20 @@
               <a:buChar char="•"/>
             </a:pPr>
             <a:r>
+              <a:rPr lang="es-CL" sz="2400" b="1" dirty="0">
+                <a:solidFill>
+                  <a:srgbClr val="1F2937"/>
+                </a:solidFill>
+              </a:rPr>
+              <a:t>If</a:t>
+            </a:r>
+            <a:r>
               <a:rPr lang="es-CL" sz="2400" dirty="0">
                 <a:solidFill>
                   <a:srgbClr val="1F2937"/>
                 </a:solidFill>
               </a:rPr>
-              <a:t>Es igual, contiene, mayor o igual, está vacío, existe; se combinan con </a:t>
-            </a:r>
-            <a:r>
-              <a:rPr lang="es-CL" sz="2400" b="1" dirty="0">
-                <a:solidFill>
-                  <a:srgbClr val="1F2937"/>
-                </a:solidFill>
-              </a:rPr>
-              <a:t>AND</a:t>
-            </a:r>
-            <a:r>
-              <a:rPr lang="es-CL" sz="2400" dirty="0">
-                <a:solidFill>
-                  <a:srgbClr val="1F2937"/>
-                </a:solidFill>
-              </a:rPr>
-              <a:t> (todas) y </a:t>
-            </a:r>
-            <a:r>
-              <a:rPr lang="es-CL" sz="2400" b="1" dirty="0">
-                <a:solidFill>
-                  <a:srgbClr val="1F2937"/>
-                </a:solidFill>
-              </a:rPr>
-              <a:t>OR</a:t>
-            </a:r>
-            <a:r>
-              <a:rPr lang="es-CL" sz="2400" dirty="0">
-                <a:solidFill>
-                  <a:srgbClr val="1F2937"/>
-                </a:solidFill>
-              </a:rPr>
-              <a:t> (al menos una).</a:t>
+              <a:t>: dos caminos (verdadero y falso).</a:t>
             </a:r>
           </a:p>
           <a:p>
@@ -1517,12 +1966,20 @@
               <a:buChar char="•"/>
             </a:pPr>
             <a:r>
+              <a:rPr lang="es-CL" sz="2400" b="1" dirty="0">
+                <a:solidFill>
+                  <a:srgbClr val="1F2937"/>
+                </a:solidFill>
+              </a:rPr>
+              <a:t>Switch</a:t>
+            </a:r>
+            <a:r>
               <a:rPr lang="es-CL" sz="2400" dirty="0">
                 <a:solidFill>
                   <a:srgbClr val="1F2937"/>
                 </a:solidFill>
               </a:rPr>
-              <a:t>En expresiones: ===, &gt;=, &amp;&amp;, \|\| (o), !.</a:t>
+              <a:t>: varias rutas por reglas o por una expresión.</a:t>
             </a:r>
           </a:p>
         </p:txBody>
@@ -1555,7 +2012,7 @@
                   <a:srgbClr val="6B7280"/>
                 </a:solidFill>
               </a:rPr>
-              <a:t>PF1821 · Módulo 2 · Cápsula 4 · AE4</a:t>
+              <a:t>PF1821 · Módulo 2 · Cápsula 4 · Aprendizaje esperado 4</a:t>
             </a:r>
           </a:p>
         </p:txBody>
@@ -1609,14 +2066,57 @@
       </p:sp>
       <p:sp>
         <p:nvSpPr>
+          <p:cNvPr id="7" name="Etiqueta"/>
+          <p:cNvSpPr txBox="1"/>
+          <p:nvPr/>
+        </p:nvSpPr>
+        <p:spPr>
+          <a:xfrm>
+            <a:off x="609600" y="228600"/>
+            <a:ext cx="7315200" cy="914400"/>
+          </a:xfrm>
+          <a:prstGeom prst="rect">
+            <a:avLst/>
+          </a:prstGeom>
+          <a:noFill/>
+        </p:spPr>
+        <p:txBody>
+          <a:bodyPr wrap="square" lIns="0" rIns="0" anchor="b">
+            <a:normAutofit/>
+          </a:bodyPr>
+          <a:lstStyle/>
+          <a:p>
+            <a:r>
+              <a:rPr lang="es-CL" sz="1200" b="1" dirty="0">
+                <a:solidFill>
+                  <a:srgbClr val="0E7490"/>
+                </a:solidFill>
+              </a:rPr>
+              <a:t>CONTENIDO DEL PLAN (TEXTUAL)</a:t>
+            </a:r>
+          </a:p>
+          <a:p>
+            <a:r>
+              <a:rPr lang="es-CL" sz="1200" b="1" dirty="0">
+                <a:solidFill>
+                  <a:srgbClr val="0F3D5E"/>
+                </a:solidFill>
+              </a:rPr>
+              <a:t>OPERADORES Y EXPRESIONES COMPLEJAS.</a:t>
+            </a:r>
+          </a:p>
+        </p:txBody>
+      </p:sp>
+      <p:sp>
+        <p:nvSpPr>
           <p:cNvPr id="3" name="Título"/>
           <p:cNvSpPr txBox="1"/>
           <p:nvPr/>
         </p:nvSpPr>
         <p:spPr>
           <a:xfrm>
-            <a:off x="609600" y="381000"/>
-            <a:ext cx="7315200" cy="990600"/>
+            <a:off x="609600" y="1181100"/>
+            <a:ext cx="7315200" cy="685800"/>
           </a:xfrm>
           <a:prstGeom prst="rect">
             <a:avLst/>
@@ -1630,12 +2130,12 @@
           <a:lstStyle/>
           <a:p>
             <a:r>
-              <a:rPr lang="es-CL" sz="3200" b="1" dirty="0">
+              <a:rPr lang="es-CL" sz="2800" b="1" dirty="0">
                 <a:solidFill>
                   <a:srgbClr val="0F3D5E"/>
                 </a:solidFill>
               </a:rPr>
-              <a:t>Enrutar datos</a:t>
+              <a:t>Operadores</a:t>
             </a:r>
           </a:p>
         </p:txBody>
@@ -1648,7 +2148,7 @@
         </p:nvSpPr>
         <p:spPr>
           <a:xfrm>
-            <a:off x="609600" y="1447800"/>
+            <a:off x="609600" y="1943100"/>
             <a:ext cx="1066800" cy="50800"/>
           </a:xfrm>
           <a:prstGeom prst="rect">
@@ -1670,8 +2170,8 @@
         </p:nvSpPr>
         <p:spPr>
           <a:xfrm>
-            <a:off x="609600" y="1676400"/>
-            <a:ext cx="7315200" cy="4419600"/>
+            <a:off x="609600" y="2095500"/>
+            <a:ext cx="7315200" cy="4000500"/>
           </a:xfrm>
           <a:prstGeom prst="rect">
             <a:avLst/>
@@ -1700,7 +2200,39 @@
                   <a:srgbClr val="1F2937"/>
                 </a:solidFill>
               </a:rPr>
-              <a:t>Ejemplo de Mercado Austral: mayorista (por tipo o por monto) → ventas; regiones → despacho regional; resto → bodega RM.</a:t>
+              <a:t>Es igual, contiene, mayor o igual, está vacío, existe; se combinan con </a:t>
+            </a:r>
+            <a:r>
+              <a:rPr lang="es-CL" sz="2400" b="1" dirty="0">
+                <a:solidFill>
+                  <a:srgbClr val="1F2937"/>
+                </a:solidFill>
+              </a:rPr>
+              <a:t>AND</a:t>
+            </a:r>
+            <a:r>
+              <a:rPr lang="es-CL" sz="2400" dirty="0">
+                <a:solidFill>
+                  <a:srgbClr val="1F2937"/>
+                </a:solidFill>
+              </a:rPr>
+              <a:t> (todas) y </a:t>
+            </a:r>
+            <a:r>
+              <a:rPr lang="es-CL" sz="2400" b="1" dirty="0">
+                <a:solidFill>
+                  <a:srgbClr val="1F2937"/>
+                </a:solidFill>
+              </a:rPr>
+              <a:t>OR</a:t>
+            </a:r>
+            <a:r>
+              <a:rPr lang="es-CL" sz="2400" dirty="0">
+                <a:solidFill>
+                  <a:srgbClr val="1F2937"/>
+                </a:solidFill>
+              </a:rPr>
+              <a:t> (al menos una).</a:t>
             </a:r>
           </a:p>
           <a:p>
@@ -1720,7 +2252,7 @@
                   <a:srgbClr val="1F2937"/>
                 </a:solidFill>
               </a:rPr>
-              <a:t>El orden de las reglas importa: gana la primera que se cumple.</a:t>
+              <a:t>En expresiones: ===, &gt;=, &amp;&amp;, \|\| (o), !.</a:t>
             </a:r>
           </a:p>
         </p:txBody>
@@ -1753,7 +2285,7 @@
                   <a:srgbClr val="6B7280"/>
                 </a:solidFill>
               </a:rPr>
-              <a:t>PF1821 · Módulo 2 · Cápsula 4 · AE4</a:t>
+              <a:t>PF1821 · Módulo 2 · Cápsula 4 · Aprendizaje esperado 4</a:t>
             </a:r>
           </a:p>
         </p:txBody>
@@ -1807,14 +2339,57 @@
       </p:sp>
       <p:sp>
         <p:nvSpPr>
+          <p:cNvPr id="7" name="Etiqueta"/>
+          <p:cNvSpPr txBox="1"/>
+          <p:nvPr/>
+        </p:nvSpPr>
+        <p:spPr>
+          <a:xfrm>
+            <a:off x="609600" y="228600"/>
+            <a:ext cx="7315200" cy="914400"/>
+          </a:xfrm>
+          <a:prstGeom prst="rect">
+            <a:avLst/>
+          </a:prstGeom>
+          <a:noFill/>
+        </p:spPr>
+        <p:txBody>
+          <a:bodyPr wrap="square" lIns="0" rIns="0" anchor="b">
+            <a:normAutofit/>
+          </a:bodyPr>
+          <a:lstStyle/>
+          <a:p>
+            <a:r>
+              <a:rPr lang="es-CL" sz="1200" b="1" dirty="0">
+                <a:solidFill>
+                  <a:srgbClr val="0E7490"/>
+                </a:solidFill>
+              </a:rPr>
+              <a:t>CONTENIDO DEL PLAN (TEXTUAL)</a:t>
+            </a:r>
+          </a:p>
+          <a:p>
+            <a:r>
+              <a:rPr lang="es-CL" sz="1200" b="1" dirty="0">
+                <a:solidFill>
+                  <a:srgbClr val="0F3D5E"/>
+                </a:solidFill>
+              </a:rPr>
+              <a:t>ROUTING DE DATOS.</a:t>
+            </a:r>
+          </a:p>
+        </p:txBody>
+      </p:sp>
+      <p:sp>
+        <p:nvSpPr>
           <p:cNvPr id="3" name="Título"/>
           <p:cNvSpPr txBox="1"/>
           <p:nvPr/>
         </p:nvSpPr>
         <p:spPr>
           <a:xfrm>
-            <a:off x="609600" y="381000"/>
-            <a:ext cx="7315200" cy="990600"/>
+            <a:off x="609600" y="1181100"/>
+            <a:ext cx="7315200" cy="685800"/>
           </a:xfrm>
           <a:prstGeom prst="rect">
             <a:avLst/>
@@ -1828,12 +2403,12 @@
           <a:lstStyle/>
           <a:p>
             <a:r>
-              <a:rPr lang="es-CL" sz="3200" b="1" dirty="0">
+              <a:rPr lang="es-CL" sz="2800" b="1" dirty="0">
                 <a:solidFill>
                   <a:srgbClr val="0F3D5E"/>
                 </a:solidFill>
               </a:rPr>
-              <a:t>Casos borde</a:t>
+              <a:t>Enrutar datos</a:t>
             </a:r>
           </a:p>
         </p:txBody>
@@ -1846,7 +2421,7 @@
         </p:nvSpPr>
         <p:spPr>
           <a:xfrm>
-            <a:off x="609600" y="1447800"/>
+            <a:off x="609600" y="1943100"/>
             <a:ext cx="1066800" cy="50800"/>
           </a:xfrm>
           <a:prstGeom prst="rect">
@@ -1868,8 +2443,8 @@
         </p:nvSpPr>
         <p:spPr>
           <a:xfrm>
-            <a:off x="609600" y="1676400"/>
-            <a:ext cx="7315200" cy="4419600"/>
+            <a:off x="609600" y="2095500"/>
+            <a:ext cx="7315200" cy="4000500"/>
           </a:xfrm>
           <a:prstGeom prst="rect">
             <a:avLst/>
@@ -1898,7 +2473,7 @@
                   <a:srgbClr val="1F2937"/>
                 </a:solidFill>
               </a:rPr>
-              <a:t>Campos vacíos, tipos equivocados, valores que nadie previó ("distribuidor"), duplicados.</a:t>
+              <a:t>Ejemplo de Mercado Austral: mayorista (por tipo o por monto) → ventas; regiones → despacho regional; resto → bodega RM.</a:t>
             </a:r>
           </a:p>
           <a:p>
@@ -1918,23 +2493,7 @@
                   <a:srgbClr val="1F2937"/>
                 </a:solidFill>
               </a:rPr>
-              <a:t>La </a:t>
-            </a:r>
-            <a:r>
-              <a:rPr lang="es-CL" sz="2400" b="1" dirty="0">
-                <a:solidFill>
-                  <a:srgbClr val="1F2937"/>
-                </a:solidFill>
-              </a:rPr>
-              <a:t>salida de respaldo</a:t>
-            </a:r>
-            <a:r>
-              <a:rPr lang="es-CL" sz="2400" dirty="0">
-                <a:solidFill>
-                  <a:srgbClr val="1F2937"/>
-                </a:solidFill>
-              </a:rPr>
-              <a:t> evita que se pierdan en silencio.</a:t>
+              <a:t>El orden de las reglas importa: gana la primera que se cumple.</a:t>
             </a:r>
           </a:p>
         </p:txBody>
@@ -1967,7 +2526,7 @@
                   <a:srgbClr val="6B7280"/>
                 </a:solidFill>
               </a:rPr>
-              <a:t>PF1821 · Módulo 2 · Cápsula 4 · AE4</a:t>
+              <a:t>PF1821 · Módulo 2 · Cápsula 4 · Aprendizaje esperado 4</a:t>
             </a:r>
           </a:p>
         </p:txBody>
@@ -2021,14 +2580,57 @@
       </p:sp>
       <p:sp>
         <p:nvSpPr>
+          <p:cNvPr id="7" name="Etiqueta"/>
+          <p:cNvSpPr txBox="1"/>
+          <p:nvPr/>
+        </p:nvSpPr>
+        <p:spPr>
+          <a:xfrm>
+            <a:off x="609600" y="228600"/>
+            <a:ext cx="7315200" cy="914400"/>
+          </a:xfrm>
+          <a:prstGeom prst="rect">
+            <a:avLst/>
+          </a:prstGeom>
+          <a:noFill/>
+        </p:spPr>
+        <p:txBody>
+          <a:bodyPr wrap="square" lIns="0" rIns="0" anchor="b">
+            <a:normAutofit/>
+          </a:bodyPr>
+          <a:lstStyle/>
+          <a:p>
+            <a:r>
+              <a:rPr lang="es-CL" sz="1200" b="1" dirty="0">
+                <a:solidFill>
+                  <a:srgbClr val="0E7490"/>
+                </a:solidFill>
+              </a:rPr>
+              <a:t>CONTENIDO DEL PLAN (TEXTUAL)</a:t>
+            </a:r>
+          </a:p>
+          <a:p>
+            <a:r>
+              <a:rPr lang="es-CL" sz="1200" b="1" dirty="0">
+                <a:solidFill>
+                  <a:srgbClr val="0F3D5E"/>
+                </a:solidFill>
+              </a:rPr>
+              <a:t>MANEJO DE CASOS EDGE.</a:t>
+            </a:r>
+          </a:p>
+        </p:txBody>
+      </p:sp>
+      <p:sp>
+        <p:nvSpPr>
           <p:cNvPr id="3" name="Título"/>
           <p:cNvSpPr txBox="1"/>
           <p:nvPr/>
         </p:nvSpPr>
         <p:spPr>
           <a:xfrm>
-            <a:off x="609600" y="381000"/>
-            <a:ext cx="7315200" cy="990600"/>
+            <a:off x="609600" y="1181100"/>
+            <a:ext cx="7315200" cy="685800"/>
           </a:xfrm>
           <a:prstGeom prst="rect">
             <a:avLst/>
@@ -2042,12 +2644,12 @@
           <a:lstStyle/>
           <a:p>
             <a:r>
-              <a:rPr lang="es-CL" sz="3200" b="1" dirty="0">
+              <a:rPr lang="es-CL" sz="2800" b="1" dirty="0">
                 <a:solidFill>
                   <a:srgbClr val="0F3D5E"/>
                 </a:solidFill>
               </a:rPr>
-              <a:t>Herramientas de depuración</a:t>
+              <a:t>Casos borde</a:t>
             </a:r>
           </a:p>
         </p:txBody>
@@ -2060,7 +2662,7 @@
         </p:nvSpPr>
         <p:spPr>
           <a:xfrm>
-            <a:off x="609600" y="1447800"/>
+            <a:off x="609600" y="1943100"/>
             <a:ext cx="1066800" cy="50800"/>
           </a:xfrm>
           <a:prstGeom prst="rect">
@@ -2082,8 +2684,8 @@
         </p:nvSpPr>
         <p:spPr>
           <a:xfrm>
-            <a:off x="609600" y="1676400"/>
-            <a:ext cx="7315200" cy="4419600"/>
+            <a:off x="609600" y="2095500"/>
+            <a:ext cx="7315200" cy="4000500"/>
           </a:xfrm>
           <a:prstGeom prst="rect">
             <a:avLst/>
@@ -2112,7 +2714,43 @@
                   <a:srgbClr val="1F2937"/>
                 </a:solidFill>
               </a:rPr>
-              <a:t>Historial de ejecuciones (cada corrida con sus datos) · ejecutar un solo nodo · datos fijados · mensajes de error completos.</a:t>
+              <a:t>Campos vacíos, tipos equivocados, valores que nadie previó ("distribuidor"), duplicados.</a:t>
+            </a:r>
+          </a:p>
+          <a:p>
+            <a:pPr marL="342900" indent="-342900">
+              <a:spcBef>
+                <a:spcPts val="900"/>
+              </a:spcBef>
+              <a:buClr>
+                <a:srgbClr val="0E7490"/>
+              </a:buClr>
+              <a:buFont typeface="Arial"/>
+              <a:buChar char="•"/>
+            </a:pPr>
+            <a:r>
+              <a:rPr lang="es-CL" sz="2400" dirty="0">
+                <a:solidFill>
+                  <a:srgbClr val="1F2937"/>
+                </a:solidFill>
+              </a:rPr>
+              <a:t>La </a:t>
+            </a:r>
+            <a:r>
+              <a:rPr lang="es-CL" sz="2400" b="1" dirty="0">
+                <a:solidFill>
+                  <a:srgbClr val="1F2937"/>
+                </a:solidFill>
+              </a:rPr>
+              <a:t>salida de respaldo</a:t>
+            </a:r>
+            <a:r>
+              <a:rPr lang="es-CL" sz="2400" dirty="0">
+                <a:solidFill>
+                  <a:srgbClr val="1F2937"/>
+                </a:solidFill>
+              </a:rPr>
+              <a:t> evita que se pierdan en silencio.</a:t>
             </a:r>
           </a:p>
         </p:txBody>
@@ -2145,7 +2783,7 @@
                   <a:srgbClr val="6B7280"/>
                 </a:solidFill>
               </a:rPr>
-              <a:t>PF1821 · Módulo 2 · Cápsula 4 · AE4</a:t>
+              <a:t>PF1821 · Módulo 2 · Cápsula 4 · Aprendizaje esperado 4</a:t>
             </a:r>
           </a:p>
         </p:txBody>
@@ -2199,14 +2837,57 @@
       </p:sp>
       <p:sp>
         <p:nvSpPr>
+          <p:cNvPr id="7" name="Etiqueta"/>
+          <p:cNvSpPr txBox="1"/>
+          <p:nvPr/>
+        </p:nvSpPr>
+        <p:spPr>
+          <a:xfrm>
+            <a:off x="609600" y="228600"/>
+            <a:ext cx="7315200" cy="914400"/>
+          </a:xfrm>
+          <a:prstGeom prst="rect">
+            <a:avLst/>
+          </a:prstGeom>
+          <a:noFill/>
+        </p:spPr>
+        <p:txBody>
+          <a:bodyPr wrap="square" lIns="0" rIns="0" anchor="b">
+            <a:normAutofit/>
+          </a:bodyPr>
+          <a:lstStyle/>
+          <a:p>
+            <a:r>
+              <a:rPr lang="es-CL" sz="1200" b="1" dirty="0">
+                <a:solidFill>
+                  <a:srgbClr val="0E7490"/>
+                </a:solidFill>
+              </a:rPr>
+              <a:t>CONTENIDO DEL PLAN (TEXTUAL)</a:t>
+            </a:r>
+          </a:p>
+          <a:p>
+            <a:r>
+              <a:rPr lang="es-CL" sz="1200" b="1" dirty="0">
+                <a:solidFill>
+                  <a:srgbClr val="0F3D5E"/>
+                </a:solidFill>
+              </a:rPr>
+              <a:t>HERRAMIENTAS DE DEBUG EN N8N.</a:t>
+            </a:r>
+          </a:p>
+        </p:txBody>
+      </p:sp>
+      <p:sp>
+        <p:nvSpPr>
           <p:cNvPr id="3" name="Título"/>
           <p:cNvSpPr txBox="1"/>
           <p:nvPr/>
         </p:nvSpPr>
         <p:spPr>
           <a:xfrm>
-            <a:off x="609600" y="381000"/>
-            <a:ext cx="7315200" cy="990600"/>
+            <a:off x="609600" y="1181100"/>
+            <a:ext cx="7315200" cy="685800"/>
           </a:xfrm>
           <a:prstGeom prst="rect">
             <a:avLst/>
@@ -2220,12 +2901,12 @@
           <a:lstStyle/>
           <a:p>
             <a:r>
-              <a:rPr lang="es-CL" sz="3200" b="1" dirty="0">
+              <a:rPr lang="es-CL" sz="2800" b="1" dirty="0">
                 <a:solidFill>
                   <a:srgbClr val="0F3D5E"/>
                 </a:solidFill>
               </a:rPr>
-              <a:t>Contar ítems</a:t>
+              <a:t>Herramientas de depuración</a:t>
             </a:r>
           </a:p>
         </p:txBody>
@@ -2238,7 +2919,7 @@
         </p:nvSpPr>
         <p:spPr>
           <a:xfrm>
-            <a:off x="609600" y="1447800"/>
+            <a:off x="609600" y="1943100"/>
             <a:ext cx="1066800" cy="50800"/>
           </a:xfrm>
           <a:prstGeom prst="rect">
@@ -2260,8 +2941,8 @@
         </p:nvSpPr>
         <p:spPr>
           <a:xfrm>
-            <a:off x="609600" y="1676400"/>
-            <a:ext cx="7315200" cy="4419600"/>
+            <a:off x="609600" y="2095500"/>
+            <a:ext cx="7315200" cy="4000500"/>
           </a:xfrm>
           <a:prstGeom prst="rect">
             <a:avLst/>
@@ -2290,27 +2971,7 @@
                   <a:srgbClr val="1F2937"/>
                 </a:solidFill>
               </a:rPr>
-              <a:t>La prueba más útil: ¿cuántos ítems entran y cuántos salen de cada nodo?</a:t>
-            </a:r>
-          </a:p>
-          <a:p>
-            <a:pPr marL="342900" indent="-342900">
-              <a:spcBef>
-                <a:spcPts val="900"/>
-              </a:spcBef>
-              <a:buClr>
-                <a:srgbClr val="0E7490"/>
-              </a:buClr>
-              <a:buFont typeface="Arial"/>
-              <a:buChar char="•"/>
-            </a:pPr>
-            <a:r>
-              <a:rPr lang="es-CL" sz="2400" dirty="0">
-                <a:solidFill>
-                  <a:srgbClr val="1F2937"/>
-                </a:solidFill>
-              </a:rPr>
-              <a:t>Si no cuadra, ahí está el problema.</a:t>
+              <a:t>Historial de ejecuciones (cada corrida con sus datos) · ejecutar un solo nodo · datos fijados · mensajes de error completos.</a:t>
             </a:r>
           </a:p>
         </p:txBody>
@@ -2343,7 +3004,7 @@
                   <a:srgbClr val="6B7280"/>
                 </a:solidFill>
               </a:rPr>
-              <a:t>PF1821 · Módulo 2 · Cápsula 4 · AE4</a:t>
+              <a:t>PF1821 · Módulo 2 · Cápsula 4 · Aprendizaje esperado 4</a:t>
             </a:r>
           </a:p>
         </p:txBody>
@@ -2397,14 +3058,57 @@
       </p:sp>
       <p:sp>
         <p:nvSpPr>
+          <p:cNvPr id="7" name="Etiqueta"/>
+          <p:cNvSpPr txBox="1"/>
+          <p:nvPr/>
+        </p:nvSpPr>
+        <p:spPr>
+          <a:xfrm>
+            <a:off x="609600" y="228600"/>
+            <a:ext cx="7315200" cy="914400"/>
+          </a:xfrm>
+          <a:prstGeom prst="rect">
+            <a:avLst/>
+          </a:prstGeom>
+          <a:noFill/>
+        </p:spPr>
+        <p:txBody>
+          <a:bodyPr wrap="square" lIns="0" rIns="0" anchor="b">
+            <a:normAutofit/>
+          </a:bodyPr>
+          <a:lstStyle/>
+          <a:p>
+            <a:r>
+              <a:rPr lang="es-CL" sz="1200" b="1" dirty="0">
+                <a:solidFill>
+                  <a:srgbClr val="0E7490"/>
+                </a:solidFill>
+              </a:rPr>
+              <a:t>CONTENIDO DEL PLAN (TEXTUAL)</a:t>
+            </a:r>
+          </a:p>
+          <a:p>
+            <a:r>
+              <a:rPr lang="es-CL" sz="1200" b="1" dirty="0">
+                <a:solidFill>
+                  <a:srgbClr val="0F3D5E"/>
+                </a:solidFill>
+              </a:rPr>
+              <a:t>HERRAMIENTAS DE DEBUG EN N8N.</a:t>
+            </a:r>
+          </a:p>
+        </p:txBody>
+      </p:sp>
+      <p:sp>
+        <p:nvSpPr>
           <p:cNvPr id="3" name="Título"/>
           <p:cNvSpPr txBox="1"/>
           <p:nvPr/>
         </p:nvSpPr>
         <p:spPr>
           <a:xfrm>
-            <a:off x="609600" y="381000"/>
-            <a:ext cx="7315200" cy="990600"/>
+            <a:off x="609600" y="1181100"/>
+            <a:ext cx="7315200" cy="685800"/>
           </a:xfrm>
           <a:prstGeom prst="rect">
             <a:avLst/>
@@ -2418,12 +3122,12 @@
           <a:lstStyle/>
           <a:p>
             <a:r>
-              <a:rPr lang="es-CL" sz="3200" b="1" dirty="0">
+              <a:rPr lang="es-CL" sz="2800" b="1" dirty="0">
                 <a:solidFill>
                   <a:srgbClr val="0F3D5E"/>
                 </a:solidFill>
               </a:rPr>
-              <a:t>Trazabilidad</a:t>
+              <a:t>Contar ítems</a:t>
             </a:r>
           </a:p>
         </p:txBody>
@@ -2436,7 +3140,7 @@
         </p:nvSpPr>
         <p:spPr>
           <a:xfrm>
-            <a:off x="609600" y="1447800"/>
+            <a:off x="609600" y="1943100"/>
             <a:ext cx="1066800" cy="50800"/>
           </a:xfrm>
           <a:prstGeom prst="rect">
@@ -2458,8 +3162,8 @@
         </p:nvSpPr>
         <p:spPr>
           <a:xfrm>
-            <a:off x="609600" y="1676400"/>
-            <a:ext cx="7315200" cy="4419600"/>
+            <a:off x="609600" y="2095500"/>
+            <a:ext cx="7315200" cy="4000500"/>
           </a:xfrm>
           <a:prstGeom prst="rect">
             <a:avLst/>
@@ -2483,12 +3187,32 @@
               <a:buChar char="•"/>
             </a:pPr>
             <a:r>
-              <a:rPr lang="es-CL" sz="2000" dirty="0">
+              <a:rPr lang="es-CL" sz="2400" dirty="0">
                 <a:solidFill>
                   <a:srgbClr val="1F2937"/>
                 </a:solidFill>
               </a:rPr>
-              <a:t>Guardar en cada registro la ruta tomada y el id de la ejecución ({{ $execution.id }}); manejo de errores del nodo (On Error → Continue (using error output)) y un workflow de errores con Error Trigger.</a:t>
+              <a:t>La prueba más útil: ¿cuántos ítems entran y cuántos salen de cada nodo?</a:t>
+            </a:r>
+          </a:p>
+          <a:p>
+            <a:pPr marL="342900" indent="-342900">
+              <a:spcBef>
+                <a:spcPts val="900"/>
+              </a:spcBef>
+              <a:buClr>
+                <a:srgbClr val="0E7490"/>
+              </a:buClr>
+              <a:buFont typeface="Arial"/>
+              <a:buChar char="•"/>
+            </a:pPr>
+            <a:r>
+              <a:rPr lang="es-CL" sz="2400" dirty="0">
+                <a:solidFill>
+                  <a:srgbClr val="1F2937"/>
+                </a:solidFill>
+              </a:rPr>
+              <a:t>Si no cuadra, ahí está el problema.</a:t>
             </a:r>
           </a:p>
         </p:txBody>
@@ -2521,7 +3245,7 @@
                   <a:srgbClr val="6B7280"/>
                 </a:solidFill>
               </a:rPr>
-              <a:t>PF1821 · Módulo 2 · Cápsula 4 · AE4</a:t>
+              <a:t>PF1821 · Módulo 2 · Cápsula 4 · Aprendizaje esperado 4</a:t>
             </a:r>
           </a:p>
         </p:txBody>
@@ -2575,14 +3299,57 @@
       </p:sp>
       <p:sp>
         <p:nvSpPr>
+          <p:cNvPr id="7" name="Etiqueta"/>
+          <p:cNvSpPr txBox="1"/>
+          <p:nvPr/>
+        </p:nvSpPr>
+        <p:spPr>
+          <a:xfrm>
+            <a:off x="609600" y="228600"/>
+            <a:ext cx="7315200" cy="914400"/>
+          </a:xfrm>
+          <a:prstGeom prst="rect">
+            <a:avLst/>
+          </a:prstGeom>
+          <a:noFill/>
+        </p:spPr>
+        <p:txBody>
+          <a:bodyPr wrap="square" lIns="0" rIns="0" anchor="b">
+            <a:normAutofit/>
+          </a:bodyPr>
+          <a:lstStyle/>
+          <a:p>
+            <a:r>
+              <a:rPr lang="es-CL" sz="1200" b="1" dirty="0">
+                <a:solidFill>
+                  <a:srgbClr val="0E7490"/>
+                </a:solidFill>
+              </a:rPr>
+              <a:t>CONTENIDO DEL PLAN (TEXTUAL)</a:t>
+            </a:r>
+          </a:p>
+          <a:p>
+            <a:r>
+              <a:rPr lang="es-CL" sz="1200" b="1" dirty="0">
+                <a:solidFill>
+                  <a:srgbClr val="0F3D5E"/>
+                </a:solidFill>
+              </a:rPr>
+              <a:t>LOGS Y TRAZABILIDAD.</a:t>
+            </a:r>
+          </a:p>
+        </p:txBody>
+      </p:sp>
+      <p:sp>
+        <p:nvSpPr>
           <p:cNvPr id="3" name="Título"/>
           <p:cNvSpPr txBox="1"/>
           <p:nvPr/>
         </p:nvSpPr>
         <p:spPr>
           <a:xfrm>
-            <a:off x="609600" y="381000"/>
-            <a:ext cx="7315200" cy="990600"/>
+            <a:off x="609600" y="1181100"/>
+            <a:ext cx="7315200" cy="685800"/>
           </a:xfrm>
           <a:prstGeom prst="rect">
             <a:avLst/>
@@ -2596,12 +3363,12 @@
           <a:lstStyle/>
           <a:p>
             <a:r>
-              <a:rPr lang="es-CL" sz="3200" b="1" dirty="0">
+              <a:rPr lang="es-CL" sz="2800" b="1" dirty="0">
                 <a:solidFill>
                   <a:srgbClr val="0F3D5E"/>
                 </a:solidFill>
               </a:rPr>
-              <a:t>Buenas prácticas de prueba</a:t>
+              <a:t>Trazabilidad</a:t>
             </a:r>
           </a:p>
         </p:txBody>
@@ -2614,7 +3381,7 @@
         </p:nvSpPr>
         <p:spPr>
           <a:xfrm>
-            <a:off x="609600" y="1447800"/>
+            <a:off x="609600" y="1943100"/>
             <a:ext cx="1066800" cy="50800"/>
           </a:xfrm>
           <a:prstGeom prst="rect">
@@ -2636,8 +3403,8 @@
         </p:nvSpPr>
         <p:spPr>
           <a:xfrm>
-            <a:off x="609600" y="1676400"/>
-            <a:ext cx="7315200" cy="4419600"/>
+            <a:off x="609600" y="2095500"/>
+            <a:ext cx="7315200" cy="4000500"/>
           </a:xfrm>
           <a:prstGeom prst="rect">
             <a:avLst/>
@@ -2661,12 +3428,12 @@
               <a:buChar char="•"/>
             </a:pPr>
             <a:r>
-              <a:rPr lang="es-CL" sz="2400" dirty="0">
+              <a:rPr lang="es-CL" sz="2000" dirty="0">
                 <a:solidFill>
                   <a:srgbClr val="1F2937"/>
                 </a:solidFill>
               </a:rPr>
-              <a:t>Datos de prueba que incluyan casos sucios · probar cada ruta · nombrar los nodos por lo que hacen · anotar cada falla en la bitácora.</a:t>
+              <a:t>Guardar en cada registro la ruta tomada y el id de la ejecución ({{ $execution.id }}); manejo de errores del nodo (On Error → Continue (using error output)) y un workflow de errores con Error Trigger.</a:t>
             </a:r>
           </a:p>
         </p:txBody>
@@ -2699,7 +3466,7 @@
                   <a:srgbClr val="6B7280"/>
                 </a:solidFill>
               </a:rPr>
-              <a:t>PF1821 · Módulo 2 · Cápsula 4 · AE4</a:t>
+              <a:t>PF1821 · Módulo 2 · Cápsula 4 · Aprendizaje esperado 4</a:t>
             </a:r>
           </a:p>
         </p:txBody>
